--- a/PPT/05-網路ip簡介.pptx
+++ b/PPT/05-網路ip簡介.pptx
@@ -5,6 +5,9 @@
     <p:sldMasterId id="2147483648" r:id="rId1"/>
     <p:sldMasterId id="2147483660" r:id="rId2"/>
   </p:sldMasterIdLst>
+  <p:notesMasterIdLst>
+    <p:notesMasterId r:id="rId16"/>
+  </p:notesMasterIdLst>
   <p:sldIdLst>
     <p:sldId id="256" r:id="rId3"/>
     <p:sldId id="776" r:id="rId4"/>
@@ -117,7 +120,684 @@
       </a:defRPr>
     </a:lvl9pPr>
   </p:defaultTextStyle>
+  <p:extLst>
+    <p:ext uri="{EFAFB233-063F-42B5-8137-9DF3F51BA10A}">
+      <p15:sldGuideLst xmlns:p15="http://schemas.microsoft.com/office/powerpoint/2012/main"/>
+    </p:ext>
+  </p:extLst>
 </p:presentation>
+</file>
+
+<file path=ppt/notesMasters/notesMaster1.xml><?xml version="1.0" encoding="utf-8"?>
+<p:notesMaster xmlns:a="http://schemas.openxmlformats.org/drawingml/2006/main" xmlns:r="http://schemas.openxmlformats.org/officeDocument/2006/relationships" xmlns:p="http://schemas.openxmlformats.org/presentationml/2006/main">
+  <p:cSld>
+    <p:bg>
+      <p:bgRef idx="1001">
+        <a:schemeClr val="bg1"/>
+      </p:bgRef>
+    </p:bg>
+    <p:spTree>
+      <p:nvGrpSpPr>
+        <p:cNvPr id="1" name=""/>
+        <p:cNvGrpSpPr/>
+        <p:nvPr/>
+      </p:nvGrpSpPr>
+      <p:grpSpPr>
+        <a:xfrm>
+          <a:off x="0" y="0"/>
+          <a:ext cx="0" cy="0"/>
+          <a:chOff x="0" y="0"/>
+          <a:chExt cx="0" cy="0"/>
+        </a:xfrm>
+      </p:grpSpPr>
+      <p:sp>
+        <p:nvSpPr>
+          <p:cNvPr id="2" name="頁首版面配置區 1"/>
+          <p:cNvSpPr>
+            <a:spLocks noGrp="1"/>
+          </p:cNvSpPr>
+          <p:nvPr>
+            <p:ph type="hdr" sz="quarter"/>
+          </p:nvPr>
+        </p:nvSpPr>
+        <p:spPr>
+          <a:xfrm>
+            <a:off x="0" y="0"/>
+            <a:ext cx="2971800" cy="458788"/>
+          </a:xfrm>
+          <a:prstGeom prst="rect">
+            <a:avLst/>
+          </a:prstGeom>
+        </p:spPr>
+        <p:txBody>
+          <a:bodyPr vert="horz" lIns="91440" tIns="45720" rIns="91440" bIns="45720" rtlCol="0"/>
+          <a:lstStyle>
+            <a:lvl1pPr algn="l">
+              <a:defRPr sz="1200"/>
+            </a:lvl1pPr>
+          </a:lstStyle>
+          <a:p>
+            <a:endParaRPr lang="zh-TW" altLang="en-US"/>
+          </a:p>
+        </p:txBody>
+      </p:sp>
+      <p:sp>
+        <p:nvSpPr>
+          <p:cNvPr id="3" name="日期版面配置區 2"/>
+          <p:cNvSpPr>
+            <a:spLocks noGrp="1"/>
+          </p:cNvSpPr>
+          <p:nvPr>
+            <p:ph type="dt" idx="1"/>
+          </p:nvPr>
+        </p:nvSpPr>
+        <p:spPr>
+          <a:xfrm>
+            <a:off x="3884613" y="0"/>
+            <a:ext cx="2971800" cy="458788"/>
+          </a:xfrm>
+          <a:prstGeom prst="rect">
+            <a:avLst/>
+          </a:prstGeom>
+        </p:spPr>
+        <p:txBody>
+          <a:bodyPr vert="horz" lIns="91440" tIns="45720" rIns="91440" bIns="45720" rtlCol="0"/>
+          <a:lstStyle>
+            <a:lvl1pPr algn="r">
+              <a:defRPr sz="1200"/>
+            </a:lvl1pPr>
+          </a:lstStyle>
+          <a:p>
+            <a:fld id="{2CE382A6-9C34-40B7-87B9-BF5F06077242}" type="datetimeFigureOut">
+              <a:rPr lang="zh-TW" altLang="en-US" smtClean="0"/>
+              <a:t>2026/10/7</a:t>
+            </a:fld>
+            <a:endParaRPr lang="zh-TW" altLang="en-US"/>
+          </a:p>
+        </p:txBody>
+      </p:sp>
+      <p:sp>
+        <p:nvSpPr>
+          <p:cNvPr id="4" name="投影片影像版面配置區 3"/>
+          <p:cNvSpPr>
+            <a:spLocks noGrp="1" noRot="1" noChangeAspect="1"/>
+          </p:cNvSpPr>
+          <p:nvPr>
+            <p:ph type="sldImg" idx="2"/>
+          </p:nvPr>
+        </p:nvSpPr>
+        <p:spPr>
+          <a:xfrm>
+            <a:off x="685800" y="1143000"/>
+            <a:ext cx="5486400" cy="3086100"/>
+          </a:xfrm>
+          <a:prstGeom prst="rect">
+            <a:avLst/>
+          </a:prstGeom>
+          <a:noFill/>
+          <a:ln w="12700">
+            <a:solidFill>
+              <a:prstClr val="black"/>
+            </a:solidFill>
+          </a:ln>
+        </p:spPr>
+        <p:txBody>
+          <a:bodyPr vert="horz" lIns="91440" tIns="45720" rIns="91440" bIns="45720" rtlCol="0" anchor="ctr"/>
+          <a:lstStyle/>
+          <a:p>
+            <a:endParaRPr lang="zh-TW" altLang="en-US"/>
+          </a:p>
+        </p:txBody>
+      </p:sp>
+      <p:sp>
+        <p:nvSpPr>
+          <p:cNvPr id="5" name="備忘稿版面配置區 4"/>
+          <p:cNvSpPr>
+            <a:spLocks noGrp="1"/>
+          </p:cNvSpPr>
+          <p:nvPr>
+            <p:ph type="body" sz="quarter" idx="3"/>
+          </p:nvPr>
+        </p:nvSpPr>
+        <p:spPr>
+          <a:xfrm>
+            <a:off x="685800" y="4400550"/>
+            <a:ext cx="5486400" cy="3600450"/>
+          </a:xfrm>
+          <a:prstGeom prst="rect">
+            <a:avLst/>
+          </a:prstGeom>
+        </p:spPr>
+        <p:txBody>
+          <a:bodyPr vert="horz" lIns="91440" tIns="45720" rIns="91440" bIns="45720" rtlCol="0"/>
+          <a:lstStyle/>
+          <a:p>
+            <a:pPr lvl="0"/>
+            <a:r>
+              <a:rPr lang="zh-TW" altLang="en-US"/>
+              <a:t>按一下以編輯母片文字樣式</a:t>
+            </a:r>
+          </a:p>
+          <a:p>
+            <a:pPr lvl="1"/>
+            <a:r>
+              <a:rPr lang="zh-TW" altLang="en-US"/>
+              <a:t>第二層</a:t>
+            </a:r>
+          </a:p>
+          <a:p>
+            <a:pPr lvl="2"/>
+            <a:r>
+              <a:rPr lang="zh-TW" altLang="en-US"/>
+              <a:t>第三層</a:t>
+            </a:r>
+          </a:p>
+          <a:p>
+            <a:pPr lvl="3"/>
+            <a:r>
+              <a:rPr lang="zh-TW" altLang="en-US"/>
+              <a:t>第四層</a:t>
+            </a:r>
+          </a:p>
+          <a:p>
+            <a:pPr lvl="4"/>
+            <a:r>
+              <a:rPr lang="zh-TW" altLang="en-US"/>
+              <a:t>第五層</a:t>
+            </a:r>
+          </a:p>
+        </p:txBody>
+      </p:sp>
+      <p:sp>
+        <p:nvSpPr>
+          <p:cNvPr id="6" name="頁尾版面配置區 5"/>
+          <p:cNvSpPr>
+            <a:spLocks noGrp="1"/>
+          </p:cNvSpPr>
+          <p:nvPr>
+            <p:ph type="ftr" sz="quarter" idx="4"/>
+          </p:nvPr>
+        </p:nvSpPr>
+        <p:spPr>
+          <a:xfrm>
+            <a:off x="0" y="8685213"/>
+            <a:ext cx="2971800" cy="458787"/>
+          </a:xfrm>
+          <a:prstGeom prst="rect">
+            <a:avLst/>
+          </a:prstGeom>
+        </p:spPr>
+        <p:txBody>
+          <a:bodyPr vert="horz" lIns="91440" tIns="45720" rIns="91440" bIns="45720" rtlCol="0" anchor="b"/>
+          <a:lstStyle>
+            <a:lvl1pPr algn="l">
+              <a:defRPr sz="1200"/>
+            </a:lvl1pPr>
+          </a:lstStyle>
+          <a:p>
+            <a:endParaRPr lang="zh-TW" altLang="en-US"/>
+          </a:p>
+        </p:txBody>
+      </p:sp>
+      <p:sp>
+        <p:nvSpPr>
+          <p:cNvPr id="7" name="投影片編號版面配置區 6"/>
+          <p:cNvSpPr>
+            <a:spLocks noGrp="1"/>
+          </p:cNvSpPr>
+          <p:nvPr>
+            <p:ph type="sldNum" sz="quarter" idx="5"/>
+          </p:nvPr>
+        </p:nvSpPr>
+        <p:spPr>
+          <a:xfrm>
+            <a:off x="3884613" y="8685213"/>
+            <a:ext cx="2971800" cy="458787"/>
+          </a:xfrm>
+          <a:prstGeom prst="rect">
+            <a:avLst/>
+          </a:prstGeom>
+        </p:spPr>
+        <p:txBody>
+          <a:bodyPr vert="horz" lIns="91440" tIns="45720" rIns="91440" bIns="45720" rtlCol="0" anchor="b"/>
+          <a:lstStyle>
+            <a:lvl1pPr algn="r">
+              <a:defRPr sz="1200"/>
+            </a:lvl1pPr>
+          </a:lstStyle>
+          <a:p>
+            <a:fld id="{ADDA3813-6577-44EA-95FF-FB17545C8788}" type="slidenum">
+              <a:rPr lang="zh-TW" altLang="en-US" smtClean="0"/>
+              <a:t>‹#›</a:t>
+            </a:fld>
+            <a:endParaRPr lang="zh-TW" altLang="en-US"/>
+          </a:p>
+        </p:txBody>
+      </p:sp>
+    </p:spTree>
+    <p:extLst>
+      <p:ext uri="{BB962C8B-B14F-4D97-AF65-F5344CB8AC3E}">
+        <p14:creationId xmlns:p14="http://schemas.microsoft.com/office/powerpoint/2010/main" val="362667884"/>
+      </p:ext>
+    </p:extLst>
+  </p:cSld>
+  <p:clrMap bg1="lt1" tx1="dk1" bg2="lt2" tx2="dk2" accent1="accent1" accent2="accent2" accent3="accent3" accent4="accent4" accent5="accent5" accent6="accent6" hlink="hlink" folHlink="folHlink"/>
+  <p:notesStyle>
+    <a:lvl1pPr marL="0" algn="l" defTabSz="914400" rtl="0" eaLnBrk="1" latinLnBrk="0" hangingPunct="1">
+      <a:defRPr sz="1200" kern="1200">
+        <a:solidFill>
+          <a:schemeClr val="tx1"/>
+        </a:solidFill>
+        <a:latin typeface="+mn-lt"/>
+        <a:ea typeface="+mn-ea"/>
+        <a:cs typeface="+mn-cs"/>
+      </a:defRPr>
+    </a:lvl1pPr>
+    <a:lvl2pPr marL="457200" algn="l" defTabSz="914400" rtl="0" eaLnBrk="1" latinLnBrk="0" hangingPunct="1">
+      <a:defRPr sz="1200" kern="1200">
+        <a:solidFill>
+          <a:schemeClr val="tx1"/>
+        </a:solidFill>
+        <a:latin typeface="+mn-lt"/>
+        <a:ea typeface="+mn-ea"/>
+        <a:cs typeface="+mn-cs"/>
+      </a:defRPr>
+    </a:lvl2pPr>
+    <a:lvl3pPr marL="914400" algn="l" defTabSz="914400" rtl="0" eaLnBrk="1" latinLnBrk="0" hangingPunct="1">
+      <a:defRPr sz="1200" kern="1200">
+        <a:solidFill>
+          <a:schemeClr val="tx1"/>
+        </a:solidFill>
+        <a:latin typeface="+mn-lt"/>
+        <a:ea typeface="+mn-ea"/>
+        <a:cs typeface="+mn-cs"/>
+      </a:defRPr>
+    </a:lvl3pPr>
+    <a:lvl4pPr marL="1371600" algn="l" defTabSz="914400" rtl="0" eaLnBrk="1" latinLnBrk="0" hangingPunct="1">
+      <a:defRPr sz="1200" kern="1200">
+        <a:solidFill>
+          <a:schemeClr val="tx1"/>
+        </a:solidFill>
+        <a:latin typeface="+mn-lt"/>
+        <a:ea typeface="+mn-ea"/>
+        <a:cs typeface="+mn-cs"/>
+      </a:defRPr>
+    </a:lvl4pPr>
+    <a:lvl5pPr marL="1828800" algn="l" defTabSz="914400" rtl="0" eaLnBrk="1" latinLnBrk="0" hangingPunct="1">
+      <a:defRPr sz="1200" kern="1200">
+        <a:solidFill>
+          <a:schemeClr val="tx1"/>
+        </a:solidFill>
+        <a:latin typeface="+mn-lt"/>
+        <a:ea typeface="+mn-ea"/>
+        <a:cs typeface="+mn-cs"/>
+      </a:defRPr>
+    </a:lvl5pPr>
+    <a:lvl6pPr marL="2286000" algn="l" defTabSz="914400" rtl="0" eaLnBrk="1" latinLnBrk="0" hangingPunct="1">
+      <a:defRPr sz="1200" kern="1200">
+        <a:solidFill>
+          <a:schemeClr val="tx1"/>
+        </a:solidFill>
+        <a:latin typeface="+mn-lt"/>
+        <a:ea typeface="+mn-ea"/>
+        <a:cs typeface="+mn-cs"/>
+      </a:defRPr>
+    </a:lvl6pPr>
+    <a:lvl7pPr marL="2743200" algn="l" defTabSz="914400" rtl="0" eaLnBrk="1" latinLnBrk="0" hangingPunct="1">
+      <a:defRPr sz="1200" kern="1200">
+        <a:solidFill>
+          <a:schemeClr val="tx1"/>
+        </a:solidFill>
+        <a:latin typeface="+mn-lt"/>
+        <a:ea typeface="+mn-ea"/>
+        <a:cs typeface="+mn-cs"/>
+      </a:defRPr>
+    </a:lvl7pPr>
+    <a:lvl8pPr marL="3200400" algn="l" defTabSz="914400" rtl="0" eaLnBrk="1" latinLnBrk="0" hangingPunct="1">
+      <a:defRPr sz="1200" kern="1200">
+        <a:solidFill>
+          <a:schemeClr val="tx1"/>
+        </a:solidFill>
+        <a:latin typeface="+mn-lt"/>
+        <a:ea typeface="+mn-ea"/>
+        <a:cs typeface="+mn-cs"/>
+      </a:defRPr>
+    </a:lvl8pPr>
+    <a:lvl9pPr marL="3657600" algn="l" defTabSz="914400" rtl="0" eaLnBrk="1" latinLnBrk="0" hangingPunct="1">
+      <a:defRPr sz="1200" kern="1200">
+        <a:solidFill>
+          <a:schemeClr val="tx1"/>
+        </a:solidFill>
+        <a:latin typeface="+mn-lt"/>
+        <a:ea typeface="+mn-ea"/>
+        <a:cs typeface="+mn-cs"/>
+      </a:defRPr>
+    </a:lvl9pPr>
+  </p:notesStyle>
+</p:notesMaster>
+</file>
+
+<file path=ppt/notesSlides/notesSlide1.xml><?xml version="1.0" encoding="utf-8"?>
+<p:notes xmlns:a="http://schemas.openxmlformats.org/drawingml/2006/main" xmlns:r="http://schemas.openxmlformats.org/officeDocument/2006/relationships" xmlns:p="http://schemas.openxmlformats.org/presentationml/2006/main">
+  <p:cSld>
+    <p:spTree>
+      <p:nvGrpSpPr>
+        <p:cNvPr id="1" name=""/>
+        <p:cNvGrpSpPr/>
+        <p:nvPr/>
+      </p:nvGrpSpPr>
+      <p:grpSpPr>
+        <a:xfrm>
+          <a:off x="0" y="0"/>
+          <a:ext cx="0" cy="0"/>
+          <a:chOff x="0" y="0"/>
+          <a:chExt cx="0" cy="0"/>
+        </a:xfrm>
+      </p:grpSpPr>
+      <p:sp>
+        <p:nvSpPr>
+          <p:cNvPr id="2" name="投影片影像版面配置區 1"/>
+          <p:cNvSpPr>
+            <a:spLocks noGrp="1" noRot="1" noChangeAspect="1"/>
+          </p:cNvSpPr>
+          <p:nvPr>
+            <p:ph type="sldImg"/>
+          </p:nvPr>
+        </p:nvSpPr>
+        <p:spPr/>
+      </p:sp>
+      <p:sp>
+        <p:nvSpPr>
+          <p:cNvPr id="3" name="備忘稿版面配置區 2"/>
+          <p:cNvSpPr>
+            <a:spLocks noGrp="1"/>
+          </p:cNvSpPr>
+          <p:nvPr>
+            <p:ph type="body" idx="1"/>
+          </p:nvPr>
+        </p:nvSpPr>
+        <p:spPr/>
+        <p:txBody>
+          <a:bodyPr/>
+          <a:lstStyle/>
+          <a:p>
+            <a:r>
+              <a:rPr lang="en-US" altLang="zh-TW" dirty="0"/>
+              <a:t>C</a:t>
+            </a:r>
+            <a:r>
+              <a:rPr lang="zh-TW" altLang="en-US" dirty="0"/>
+              <a:t>：</a:t>
+            </a:r>
+            <a:r>
+              <a:rPr lang="en-US" altLang="zh-TW" dirty="0"/>
+              <a:t>128+64=192+32=224+16=240</a:t>
+            </a:r>
+            <a:endParaRPr lang="zh-TW" altLang="en-US" dirty="0"/>
+          </a:p>
+        </p:txBody>
+      </p:sp>
+      <p:sp>
+        <p:nvSpPr>
+          <p:cNvPr id="4" name="投影片編號版面配置區 3"/>
+          <p:cNvSpPr>
+            <a:spLocks noGrp="1"/>
+          </p:cNvSpPr>
+          <p:nvPr>
+            <p:ph type="sldNum" sz="quarter" idx="5"/>
+          </p:nvPr>
+        </p:nvSpPr>
+        <p:spPr/>
+        <p:txBody>
+          <a:bodyPr/>
+          <a:lstStyle/>
+          <a:p>
+            <a:fld id="{ADDA3813-6577-44EA-95FF-FB17545C8788}" type="slidenum">
+              <a:rPr lang="zh-TW" altLang="en-US" smtClean="0"/>
+              <a:t>5</a:t>
+            </a:fld>
+            <a:endParaRPr lang="zh-TW" altLang="en-US"/>
+          </a:p>
+        </p:txBody>
+      </p:sp>
+    </p:spTree>
+    <p:extLst>
+      <p:ext uri="{BB962C8B-B14F-4D97-AF65-F5344CB8AC3E}">
+        <p14:creationId xmlns:p14="http://schemas.microsoft.com/office/powerpoint/2010/main" val="2869188687"/>
+      </p:ext>
+    </p:extLst>
+  </p:cSld>
+  <p:clrMapOvr>
+    <a:masterClrMapping/>
+  </p:clrMapOvr>
+</p:notes>
+</file>
+
+<file path=ppt/notesSlides/notesSlide2.xml><?xml version="1.0" encoding="utf-8"?>
+<p:notes xmlns:a="http://schemas.openxmlformats.org/drawingml/2006/main" xmlns:r="http://schemas.openxmlformats.org/officeDocument/2006/relationships" xmlns:p="http://schemas.openxmlformats.org/presentationml/2006/main">
+  <p:cSld>
+    <p:spTree>
+      <p:nvGrpSpPr>
+        <p:cNvPr id="1" name=""/>
+        <p:cNvGrpSpPr/>
+        <p:nvPr/>
+      </p:nvGrpSpPr>
+      <p:grpSpPr>
+        <a:xfrm>
+          <a:off x="0" y="0"/>
+          <a:ext cx="0" cy="0"/>
+          <a:chOff x="0" y="0"/>
+          <a:chExt cx="0" cy="0"/>
+        </a:xfrm>
+      </p:grpSpPr>
+      <p:sp>
+        <p:nvSpPr>
+          <p:cNvPr id="2" name="投影片影像版面配置區 1"/>
+          <p:cNvSpPr>
+            <a:spLocks noGrp="1" noRot="1" noChangeAspect="1"/>
+          </p:cNvSpPr>
+          <p:nvPr>
+            <p:ph type="sldImg"/>
+          </p:nvPr>
+        </p:nvSpPr>
+        <p:spPr/>
+      </p:sp>
+      <p:sp>
+        <p:nvSpPr>
+          <p:cNvPr id="3" name="備忘稿版面配置區 2"/>
+          <p:cNvSpPr>
+            <a:spLocks noGrp="1"/>
+          </p:cNvSpPr>
+          <p:nvPr>
+            <p:ph type="body" idx="1"/>
+          </p:nvPr>
+        </p:nvSpPr>
+        <p:spPr/>
+        <p:txBody>
+          <a:bodyPr/>
+          <a:lstStyle/>
+          <a:p>
+            <a:r>
+              <a:rPr lang="zh-TW" altLang="en-US" dirty="0"/>
+              <a:t>前面三個都要相同，所以是三個</a:t>
+            </a:r>
+            <a:r>
+              <a:rPr lang="en-US" altLang="zh-TW" dirty="0"/>
+              <a:t>255</a:t>
+            </a:r>
+            <a:r>
+              <a:rPr lang="zh-TW" altLang="en-US" dirty="0"/>
+              <a:t>，二進制是</a:t>
+            </a:r>
+            <a:r>
+              <a:rPr lang="en-US" altLang="zh-TW" dirty="0"/>
+              <a:t>1</a:t>
+            </a:r>
+            <a:r>
+              <a:rPr lang="zh-TW" altLang="en-US" dirty="0"/>
+              <a:t>代表以對方是</a:t>
+            </a:r>
+            <a:r>
+              <a:rPr lang="en-US" altLang="zh-TW" dirty="0"/>
+              <a:t>0</a:t>
+            </a:r>
+            <a:r>
+              <a:rPr lang="zh-TW" altLang="en-US" dirty="0"/>
+              <a:t>或</a:t>
+            </a:r>
+            <a:r>
+              <a:rPr lang="en-US" altLang="zh-TW" dirty="0"/>
+              <a:t>1</a:t>
+            </a:r>
+            <a:r>
+              <a:rPr lang="zh-TW" altLang="en-US" dirty="0"/>
+              <a:t>來決定結果，最後一個填</a:t>
+            </a:r>
+            <a:r>
+              <a:rPr lang="en-US" altLang="zh-TW" dirty="0"/>
+              <a:t>0</a:t>
+            </a:r>
+            <a:r>
+              <a:rPr lang="zh-TW" altLang="en-US" dirty="0"/>
+              <a:t>代表不管對方是什麼，一律強制結果為</a:t>
+            </a:r>
+            <a:r>
+              <a:rPr lang="en-US" altLang="zh-TW" dirty="0"/>
+              <a:t>0</a:t>
+            </a:r>
+            <a:r>
+              <a:rPr lang="zh-TW" altLang="en-US" dirty="0"/>
+              <a:t>，代表相同結果</a:t>
+            </a:r>
+          </a:p>
+        </p:txBody>
+      </p:sp>
+      <p:sp>
+        <p:nvSpPr>
+          <p:cNvPr id="4" name="投影片編號版面配置區 3"/>
+          <p:cNvSpPr>
+            <a:spLocks noGrp="1"/>
+          </p:cNvSpPr>
+          <p:nvPr>
+            <p:ph type="sldNum" sz="quarter" idx="5"/>
+          </p:nvPr>
+        </p:nvSpPr>
+        <p:spPr/>
+        <p:txBody>
+          <a:bodyPr/>
+          <a:lstStyle/>
+          <a:p>
+            <a:fld id="{ADDA3813-6577-44EA-95FF-FB17545C8788}" type="slidenum">
+              <a:rPr lang="zh-TW" altLang="en-US" smtClean="0"/>
+              <a:t>8</a:t>
+            </a:fld>
+            <a:endParaRPr lang="zh-TW" altLang="en-US"/>
+          </a:p>
+        </p:txBody>
+      </p:sp>
+    </p:spTree>
+    <p:extLst>
+      <p:ext uri="{BB962C8B-B14F-4D97-AF65-F5344CB8AC3E}">
+        <p14:creationId xmlns:p14="http://schemas.microsoft.com/office/powerpoint/2010/main" val="3707571348"/>
+      </p:ext>
+    </p:extLst>
+  </p:cSld>
+  <p:clrMapOvr>
+    <a:masterClrMapping/>
+  </p:clrMapOvr>
+</p:notes>
+</file>
+
+<file path=ppt/notesSlides/notesSlide3.xml><?xml version="1.0" encoding="utf-8"?>
+<p:notes xmlns:a="http://schemas.openxmlformats.org/drawingml/2006/main" xmlns:r="http://schemas.openxmlformats.org/officeDocument/2006/relationships" xmlns:p="http://schemas.openxmlformats.org/presentationml/2006/main">
+  <p:cSld>
+    <p:spTree>
+      <p:nvGrpSpPr>
+        <p:cNvPr id="1" name=""/>
+        <p:cNvGrpSpPr/>
+        <p:nvPr/>
+      </p:nvGrpSpPr>
+      <p:grpSpPr>
+        <a:xfrm>
+          <a:off x="0" y="0"/>
+          <a:ext cx="0" cy="0"/>
+          <a:chOff x="0" y="0"/>
+          <a:chExt cx="0" cy="0"/>
+        </a:xfrm>
+      </p:grpSpPr>
+      <p:sp>
+        <p:nvSpPr>
+          <p:cNvPr id="2" name="投影片影像版面配置區 1"/>
+          <p:cNvSpPr>
+            <a:spLocks noGrp="1" noRot="1" noChangeAspect="1"/>
+          </p:cNvSpPr>
+          <p:nvPr>
+            <p:ph type="sldImg"/>
+          </p:nvPr>
+        </p:nvSpPr>
+        <p:spPr/>
+      </p:sp>
+      <p:sp>
+        <p:nvSpPr>
+          <p:cNvPr id="3" name="備忘稿版面配置區 2"/>
+          <p:cNvSpPr>
+            <a:spLocks noGrp="1"/>
+          </p:cNvSpPr>
+          <p:nvPr>
+            <p:ph type="body" idx="1"/>
+          </p:nvPr>
+        </p:nvSpPr>
+        <p:spPr/>
+        <p:txBody>
+          <a:bodyPr/>
+          <a:lstStyle/>
+          <a:p>
+            <a:r>
+              <a:rPr lang="zh-TW" altLang="en-US" dirty="0"/>
+              <a:t>有的軟體授權會檢查硬體</a:t>
+            </a:r>
+            <a:r>
+              <a:rPr lang="en-US" altLang="zh-TW" dirty="0"/>
+              <a:t>MAC</a:t>
+            </a:r>
+            <a:endParaRPr lang="zh-TW" altLang="en-US" dirty="0"/>
+          </a:p>
+        </p:txBody>
+      </p:sp>
+      <p:sp>
+        <p:nvSpPr>
+          <p:cNvPr id="4" name="投影片編號版面配置區 3"/>
+          <p:cNvSpPr>
+            <a:spLocks noGrp="1"/>
+          </p:cNvSpPr>
+          <p:nvPr>
+            <p:ph type="sldNum" sz="quarter" idx="5"/>
+          </p:nvPr>
+        </p:nvSpPr>
+        <p:spPr/>
+        <p:txBody>
+          <a:bodyPr/>
+          <a:lstStyle/>
+          <a:p>
+            <a:fld id="{ADDA3813-6577-44EA-95FF-FB17545C8788}" type="slidenum">
+              <a:rPr lang="zh-TW" altLang="en-US" smtClean="0"/>
+              <a:t>13</a:t>
+            </a:fld>
+            <a:endParaRPr lang="zh-TW" altLang="en-US"/>
+          </a:p>
+        </p:txBody>
+      </p:sp>
+    </p:spTree>
+    <p:extLst>
+      <p:ext uri="{BB962C8B-B14F-4D97-AF65-F5344CB8AC3E}">
+        <p14:creationId xmlns:p14="http://schemas.microsoft.com/office/powerpoint/2010/main" val="32795676"/>
+      </p:ext>
+    </p:extLst>
+  </p:cSld>
+  <p:clrMapOvr>
+    <a:masterClrMapping/>
+  </p:clrMapOvr>
+</p:notes>
 </file>
 
 <file path=ppt/slideLayouts/slideLayout1.xml><?xml version="1.0" encoding="utf-8"?>
@@ -267,7 +947,7 @@
           <a:p>
             <a:fld id="{1CD36E49-121A-4673-BAE9-1F059CD35926}" type="datetimeFigureOut">
               <a:rPr lang="zh-TW" altLang="en-US" smtClean="0"/>
-              <a:t>2026/9/16</a:t>
+              <a:t>2026/10/7</a:t>
             </a:fld>
             <a:endParaRPr lang="zh-TW" altLang="en-US"/>
           </a:p>
@@ -465,7 +1145,7 @@
           <a:p>
             <a:fld id="{1CD36E49-121A-4673-BAE9-1F059CD35926}" type="datetimeFigureOut">
               <a:rPr lang="zh-TW" altLang="en-US" smtClean="0"/>
-              <a:t>2026/9/16</a:t>
+              <a:t>2026/10/7</a:t>
             </a:fld>
             <a:endParaRPr lang="zh-TW" altLang="en-US"/>
           </a:p>
@@ -673,7 +1353,7 @@
           <a:p>
             <a:fld id="{1CD36E49-121A-4673-BAE9-1F059CD35926}" type="datetimeFigureOut">
               <a:rPr lang="zh-TW" altLang="en-US" smtClean="0"/>
-              <a:t>2026/9/16</a:t>
+              <a:t>2026/10/7</a:t>
             </a:fld>
             <a:endParaRPr lang="zh-TW" altLang="en-US"/>
           </a:p>
@@ -2471,7 +3151,7 @@
           <a:p>
             <a:fld id="{1CD36E49-121A-4673-BAE9-1F059CD35926}" type="datetimeFigureOut">
               <a:rPr lang="zh-TW" altLang="en-US" smtClean="0"/>
-              <a:t>2026/9/16</a:t>
+              <a:t>2026/10/7</a:t>
             </a:fld>
             <a:endParaRPr lang="zh-TW" altLang="en-US"/>
           </a:p>
@@ -3615,7 +4295,7 @@
           <a:p>
             <a:fld id="{1CD36E49-121A-4673-BAE9-1F059CD35926}" type="datetimeFigureOut">
               <a:rPr lang="zh-TW" altLang="en-US" smtClean="0"/>
-              <a:t>2026/9/16</a:t>
+              <a:t>2026/10/7</a:t>
             </a:fld>
             <a:endParaRPr lang="zh-TW" altLang="en-US"/>
           </a:p>
@@ -3880,7 +4560,7 @@
           <a:p>
             <a:fld id="{1CD36E49-121A-4673-BAE9-1F059CD35926}" type="datetimeFigureOut">
               <a:rPr lang="zh-TW" altLang="en-US" smtClean="0"/>
-              <a:t>2026/9/16</a:t>
+              <a:t>2026/10/7</a:t>
             </a:fld>
             <a:endParaRPr lang="zh-TW" altLang="en-US"/>
           </a:p>
@@ -4292,7 +4972,7 @@
           <a:p>
             <a:fld id="{1CD36E49-121A-4673-BAE9-1F059CD35926}" type="datetimeFigureOut">
               <a:rPr lang="zh-TW" altLang="en-US" smtClean="0"/>
-              <a:t>2026/9/16</a:t>
+              <a:t>2026/10/7</a:t>
             </a:fld>
             <a:endParaRPr lang="zh-TW" altLang="en-US"/>
           </a:p>
@@ -4433,7 +5113,7 @@
           <a:p>
             <a:fld id="{1CD36E49-121A-4673-BAE9-1F059CD35926}" type="datetimeFigureOut">
               <a:rPr lang="zh-TW" altLang="en-US" smtClean="0"/>
-              <a:t>2026/9/16</a:t>
+              <a:t>2026/10/7</a:t>
             </a:fld>
             <a:endParaRPr lang="zh-TW" altLang="en-US"/>
           </a:p>
@@ -4546,7 +5226,7 @@
           <a:p>
             <a:fld id="{1CD36E49-121A-4673-BAE9-1F059CD35926}" type="datetimeFigureOut">
               <a:rPr lang="zh-TW" altLang="en-US" smtClean="0"/>
-              <a:t>2026/9/16</a:t>
+              <a:t>2026/10/7</a:t>
             </a:fld>
             <a:endParaRPr lang="zh-TW" altLang="en-US"/>
           </a:p>
@@ -4857,7 +5537,7 @@
           <a:p>
             <a:fld id="{1CD36E49-121A-4673-BAE9-1F059CD35926}" type="datetimeFigureOut">
               <a:rPr lang="zh-TW" altLang="en-US" smtClean="0"/>
-              <a:t>2026/9/16</a:t>
+              <a:t>2026/10/7</a:t>
             </a:fld>
             <a:endParaRPr lang="zh-TW" altLang="en-US"/>
           </a:p>
@@ -5145,7 +5825,7 @@
           <a:p>
             <a:fld id="{1CD36E49-121A-4673-BAE9-1F059CD35926}" type="datetimeFigureOut">
               <a:rPr lang="zh-TW" altLang="en-US" smtClean="0"/>
-              <a:t>2026/9/16</a:t>
+              <a:t>2026/10/7</a:t>
             </a:fld>
             <a:endParaRPr lang="zh-TW" altLang="en-US"/>
           </a:p>
@@ -5386,7 +6066,7 @@
           <a:p>
             <a:fld id="{1CD36E49-121A-4673-BAE9-1F059CD35926}" type="datetimeFigureOut">
               <a:rPr lang="zh-TW" altLang="en-US" smtClean="0"/>
-              <a:t>2026/9/16</a:t>
+              <a:t>2026/10/7</a:t>
             </a:fld>
             <a:endParaRPr lang="zh-TW" altLang="en-US"/>
           </a:p>
@@ -6763,7 +7443,7 @@
         </p:blipFill>
         <p:spPr>
           <a:xfrm>
-            <a:off x="2639616" y="4509121"/>
+            <a:off x="2639616" y="4264566"/>
             <a:ext cx="4582164" cy="362001"/>
           </a:xfrm>
           <a:prstGeom prst="rect">
@@ -6801,171 +7481,6 @@
           <a:chExt cx="0" cy="0"/>
         </a:xfrm>
       </p:grpSpPr>
-      <p:sp>
-        <p:nvSpPr>
-          <p:cNvPr id="5" name="內容版面配置區 4">
-            <a:extLst>
-              <a:ext uri="{FF2B5EF4-FFF2-40B4-BE49-F238E27FC236}">
-                <a16:creationId xmlns:a16="http://schemas.microsoft.com/office/drawing/2014/main" id="{FD5124D8-F8CA-6D0A-8928-EDD8A452F80D}"/>
-              </a:ext>
-            </a:extLst>
-          </p:cNvPr>
-          <p:cNvSpPr>
-            <a:spLocks noGrp="1"/>
-          </p:cNvSpPr>
-          <p:nvPr>
-            <p:ph sz="quarter" idx="10"/>
-          </p:nvPr>
-        </p:nvSpPr>
-        <p:spPr>
-          <a:xfrm>
-            <a:off x="1956000" y="1364512"/>
-            <a:ext cx="8460481" cy="5160832"/>
-          </a:xfrm>
-        </p:spPr>
-        <p:txBody>
-          <a:bodyPr/>
-          <a:lstStyle/>
-          <a:p>
-            <a:pPr lvl="2"/>
-            <a:endParaRPr lang="en-US" altLang="zh-TW" dirty="0"/>
-          </a:p>
-          <a:p>
-            <a:pPr lvl="2"/>
-            <a:endParaRPr lang="en-US" altLang="zh-TW" dirty="0"/>
-          </a:p>
-          <a:p>
-            <a:pPr lvl="2"/>
-            <a:endParaRPr lang="en-US" altLang="zh-TW" dirty="0"/>
-          </a:p>
-          <a:p>
-            <a:pPr lvl="2"/>
-            <a:endParaRPr lang="en-US" altLang="zh-TW" dirty="0"/>
-          </a:p>
-          <a:p>
-            <a:pPr lvl="2"/>
-            <a:endParaRPr lang="en-US" altLang="zh-TW" dirty="0"/>
-          </a:p>
-          <a:p>
-            <a:pPr lvl="2"/>
-            <a:endParaRPr lang="en-US" altLang="zh-TW" dirty="0"/>
-          </a:p>
-          <a:p>
-            <a:pPr marL="0" lvl="2" indent="0">
-              <a:buNone/>
-            </a:pPr>
-            <a:r>
-              <a:rPr lang="zh-TW" altLang="en-US" dirty="0"/>
-              <a:t>如圖</a:t>
-            </a:r>
-            <a:r>
-              <a:rPr lang="en-US" altLang="zh-TW" dirty="0"/>
-              <a:t>13-8 </a:t>
-            </a:r>
-            <a:r>
-              <a:rPr lang="zh-TW" altLang="en-US" dirty="0"/>
-              <a:t>所示</a:t>
-            </a:r>
-            <a:r>
-              <a:rPr lang="en-US" altLang="zh-TW" dirty="0"/>
-              <a:t>TCP / IP </a:t>
-            </a:r>
-            <a:r>
-              <a:rPr lang="zh-TW" altLang="en-US" dirty="0"/>
-              <a:t>四層模型，是</a:t>
-            </a:r>
-            <a:r>
-              <a:rPr lang="en-US" altLang="zh-TW" dirty="0"/>
-              <a:t>OSI </a:t>
-            </a:r>
-            <a:r>
-              <a:rPr lang="zh-TW" altLang="en-US" dirty="0"/>
-              <a:t>七層模型的簡化，分別為鏈結層（</a:t>
-            </a:r>
-            <a:r>
-              <a:rPr lang="en-US" altLang="zh-TW" dirty="0"/>
-              <a:t>Link layer</a:t>
-            </a:r>
-            <a:r>
-              <a:rPr lang="zh-TW" altLang="en-US" dirty="0"/>
-              <a:t>）、網路層（</a:t>
-            </a:r>
-            <a:r>
-              <a:rPr lang="en-US" altLang="zh-TW" dirty="0"/>
-              <a:t>Network Layer</a:t>
-            </a:r>
-            <a:r>
-              <a:rPr lang="zh-TW" altLang="en-US" dirty="0"/>
-              <a:t>）、傳輸層（</a:t>
-            </a:r>
-            <a:r>
-              <a:rPr lang="en-US" altLang="zh-TW" dirty="0"/>
-              <a:t>Transport Layer</a:t>
-            </a:r>
-            <a:r>
-              <a:rPr lang="zh-TW" altLang="en-US" dirty="0"/>
-              <a:t>）和應用層（</a:t>
-            </a:r>
-            <a:r>
-              <a:rPr lang="en-US" altLang="zh-TW" dirty="0"/>
-              <a:t>Application Layer</a:t>
-            </a:r>
-            <a:r>
-              <a:rPr lang="zh-TW" altLang="en-US" dirty="0"/>
-              <a:t>）。</a:t>
-            </a:r>
-          </a:p>
-          <a:p>
-            <a:pPr marL="0" lvl="2" indent="0">
-              <a:buNone/>
-            </a:pPr>
-            <a:r>
-              <a:rPr lang="zh-TW" altLang="en-US" dirty="0"/>
-              <a:t>鏈結層的功用是定義網路裝置間的傳輸媒體（銅線、紅外線、光纖等）、傳輸速度及傳輸訊號等，並且使用裝置的實體</a:t>
-            </a:r>
-            <a:r>
-              <a:rPr lang="en-US" altLang="zh-TW" dirty="0"/>
-              <a:t>MAC </a:t>
-            </a:r>
-            <a:r>
-              <a:rPr lang="zh-TW" altLang="en-US" dirty="0"/>
-              <a:t>位址來指定專屬的通訊對象。</a:t>
-            </a:r>
-          </a:p>
-        </p:txBody>
-      </p:sp>
-      <p:sp>
-        <p:nvSpPr>
-          <p:cNvPr id="7" name="標題 6">
-            <a:extLst>
-              <a:ext uri="{FF2B5EF4-FFF2-40B4-BE49-F238E27FC236}">
-                <a16:creationId xmlns:a16="http://schemas.microsoft.com/office/drawing/2014/main" id="{D4DF6469-0B44-D408-D15F-E0ADD5CA38F0}"/>
-              </a:ext>
-            </a:extLst>
-          </p:cNvPr>
-          <p:cNvSpPr>
-            <a:spLocks noGrp="1"/>
-          </p:cNvSpPr>
-          <p:nvPr>
-            <p:ph type="title"/>
-          </p:nvPr>
-        </p:nvSpPr>
-        <p:spPr/>
-        <p:txBody>
-          <a:bodyPr/>
-          <a:lstStyle/>
-          <a:p>
-            <a:r>
-              <a:rPr lang="en-US" altLang="zh-TW" dirty="0"/>
-              <a:t>13-2 TCP / IP </a:t>
-            </a:r>
-            <a:r>
-              <a:rPr lang="zh-TW" altLang="en-US" dirty="0"/>
-              <a:t>四層模型</a:t>
-            </a:r>
-          </a:p>
-        </p:txBody>
-      </p:sp>
       <p:pic>
         <p:nvPicPr>
           <p:cNvPr id="3" name="圖片 2">
@@ -6988,14 +7503,186 @@
         </p:blipFill>
         <p:spPr>
           <a:xfrm>
-            <a:off x="2567609" y="1268760"/>
-            <a:ext cx="6552245" cy="3018004"/>
+            <a:off x="3072809" y="116959"/>
+            <a:ext cx="9005777" cy="4137908"/>
           </a:xfrm>
           <a:prstGeom prst="rect">
             <a:avLst/>
           </a:prstGeom>
         </p:spPr>
       </p:pic>
+      <p:sp>
+        <p:nvSpPr>
+          <p:cNvPr id="5" name="內容版面配置區 4">
+            <a:extLst>
+              <a:ext uri="{FF2B5EF4-FFF2-40B4-BE49-F238E27FC236}">
+                <a16:creationId xmlns:a16="http://schemas.microsoft.com/office/drawing/2014/main" id="{FD5124D8-F8CA-6D0A-8928-EDD8A452F80D}"/>
+              </a:ext>
+            </a:extLst>
+          </p:cNvPr>
+          <p:cNvSpPr>
+            <a:spLocks noGrp="1"/>
+          </p:cNvSpPr>
+          <p:nvPr>
+            <p:ph sz="quarter" idx="10"/>
+          </p:nvPr>
+        </p:nvSpPr>
+        <p:spPr>
+          <a:xfrm>
+            <a:off x="1956000" y="1364512"/>
+            <a:ext cx="8460481" cy="5160832"/>
+          </a:xfrm>
+        </p:spPr>
+        <p:txBody>
+          <a:bodyPr/>
+          <a:lstStyle/>
+          <a:p>
+            <a:pPr lvl="2"/>
+            <a:endParaRPr lang="en-US" altLang="zh-TW" dirty="0"/>
+          </a:p>
+          <a:p>
+            <a:pPr lvl="2"/>
+            <a:endParaRPr lang="en-US" altLang="zh-TW" dirty="0"/>
+          </a:p>
+          <a:p>
+            <a:pPr lvl="2"/>
+            <a:endParaRPr lang="en-US" altLang="zh-TW" dirty="0"/>
+          </a:p>
+          <a:p>
+            <a:pPr lvl="2"/>
+            <a:endParaRPr lang="en-US" altLang="zh-TW" dirty="0"/>
+          </a:p>
+          <a:p>
+            <a:pPr lvl="2"/>
+            <a:endParaRPr lang="en-US" altLang="zh-TW" dirty="0"/>
+          </a:p>
+          <a:p>
+            <a:pPr lvl="2"/>
+            <a:endParaRPr lang="en-US" altLang="zh-TW" dirty="0"/>
+          </a:p>
+          <a:p>
+            <a:pPr marL="0" lvl="2" indent="0">
+              <a:buNone/>
+            </a:pPr>
+            <a:r>
+              <a:rPr lang="zh-TW" altLang="en-US" dirty="0"/>
+              <a:t>如圖</a:t>
+            </a:r>
+            <a:r>
+              <a:rPr lang="en-US" altLang="zh-TW" dirty="0"/>
+              <a:t>13-8 </a:t>
+            </a:r>
+            <a:r>
+              <a:rPr lang="zh-TW" altLang="en-US" dirty="0"/>
+              <a:t>所示</a:t>
+            </a:r>
+            <a:r>
+              <a:rPr lang="en-US" altLang="zh-TW" dirty="0"/>
+              <a:t>TCP / IP </a:t>
+            </a:r>
+            <a:r>
+              <a:rPr lang="zh-TW" altLang="en-US" dirty="0"/>
+              <a:t>四層模型，是</a:t>
+            </a:r>
+            <a:r>
+              <a:rPr lang="en-US" altLang="zh-TW" dirty="0"/>
+              <a:t>OSI </a:t>
+            </a:r>
+            <a:r>
+              <a:rPr lang="zh-TW" altLang="en-US" dirty="0"/>
+              <a:t>七層模型的簡化，分別為鏈結層（</a:t>
+            </a:r>
+            <a:r>
+              <a:rPr lang="en-US" altLang="zh-TW" dirty="0"/>
+              <a:t>Link layer</a:t>
+            </a:r>
+            <a:r>
+              <a:rPr lang="zh-TW" altLang="en-US" dirty="0"/>
+              <a:t>）、網路層（</a:t>
+            </a:r>
+            <a:r>
+              <a:rPr lang="en-US" altLang="zh-TW" dirty="0"/>
+              <a:t>Network Layer</a:t>
+            </a:r>
+            <a:r>
+              <a:rPr lang="zh-TW" altLang="en-US" dirty="0"/>
+              <a:t>）、傳輸層（</a:t>
+            </a:r>
+            <a:r>
+              <a:rPr lang="en-US" altLang="zh-TW" dirty="0"/>
+              <a:t>Transport Layer</a:t>
+            </a:r>
+            <a:r>
+              <a:rPr lang="zh-TW" altLang="en-US" dirty="0"/>
+              <a:t>）和應用層（</a:t>
+            </a:r>
+            <a:r>
+              <a:rPr lang="en-US" altLang="zh-TW" dirty="0"/>
+              <a:t>Application Layer</a:t>
+            </a:r>
+            <a:r>
+              <a:rPr lang="zh-TW" altLang="en-US" dirty="0"/>
+              <a:t>）。</a:t>
+            </a:r>
+          </a:p>
+          <a:p>
+            <a:pPr marL="0" lvl="2" indent="0">
+              <a:buNone/>
+            </a:pPr>
+            <a:r>
+              <a:rPr lang="zh-TW" altLang="en-US" dirty="0"/>
+              <a:t>鏈結層的功用是定義網路裝置間的傳輸媒體（銅線、紅外線、光纖等）、傳輸速度及傳輸訊號等，並且使用裝置的實體</a:t>
+            </a:r>
+            <a:r>
+              <a:rPr lang="en-US" altLang="zh-TW" dirty="0"/>
+              <a:t>MAC </a:t>
+            </a:r>
+            <a:r>
+              <a:rPr lang="zh-TW" altLang="en-US" dirty="0"/>
+              <a:t>位址來指定專屬的通訊對象。</a:t>
+            </a:r>
+          </a:p>
+        </p:txBody>
+      </p:sp>
+      <p:sp>
+        <p:nvSpPr>
+          <p:cNvPr id="7" name="標題 6">
+            <a:extLst>
+              <a:ext uri="{FF2B5EF4-FFF2-40B4-BE49-F238E27FC236}">
+                <a16:creationId xmlns:a16="http://schemas.microsoft.com/office/drawing/2014/main" id="{D4DF6469-0B44-D408-D15F-E0ADD5CA38F0}"/>
+              </a:ext>
+            </a:extLst>
+          </p:cNvPr>
+          <p:cNvSpPr>
+            <a:spLocks noGrp="1"/>
+          </p:cNvSpPr>
+          <p:nvPr>
+            <p:ph type="title"/>
+          </p:nvPr>
+        </p:nvSpPr>
+        <p:spPr>
+          <a:xfrm>
+            <a:off x="563915" y="764704"/>
+            <a:ext cx="2774708" cy="576064"/>
+          </a:xfrm>
+        </p:spPr>
+        <p:txBody>
+          <a:bodyPr>
+            <a:normAutofit fontScale="90000"/>
+          </a:bodyPr>
+          <a:lstStyle/>
+          <a:p>
+            <a:r>
+              <a:rPr lang="en-US" altLang="zh-TW" dirty="0"/>
+              <a:t>13-2 TCP / IP </a:t>
+            </a:r>
+            <a:r>
+              <a:rPr lang="zh-TW" altLang="en-US" dirty="0"/>
+              <a:t>四層模型</a:t>
+            </a:r>
+          </a:p>
+        </p:txBody>
+      </p:sp>
     </p:spTree>
     <p:extLst>
       <p:ext uri="{BB962C8B-B14F-4D97-AF65-F5344CB8AC3E}">
@@ -7076,7 +7763,7 @@
             </a:r>
             <a:r>
               <a:rPr lang="zh-TW" altLang="en-US" dirty="0"/>
-              <a:t>，而</a:t>
+              <a:t>，且是唯一的號碼，而</a:t>
             </a:r>
             <a:r>
               <a:rPr lang="en-US" altLang="zh-TW" dirty="0"/>
@@ -7104,15 +7791,15 @@
           <p:nvPr/>
         </p:nvPicPr>
         <p:blipFill>
-          <a:blip r:embed="rId2"/>
+          <a:blip r:embed="rId3"/>
           <a:stretch>
             <a:fillRect/>
           </a:stretch>
         </p:blipFill>
         <p:spPr>
           <a:xfrm>
-            <a:off x="4295801" y="2204864"/>
-            <a:ext cx="3429479" cy="1609950"/>
+            <a:off x="2105247" y="2454437"/>
+            <a:ext cx="7613730" cy="3574223"/>
           </a:xfrm>
           <a:prstGeom prst="rect">
             <a:avLst/>
@@ -7167,8 +7854,8 @@
         </p:nvSpPr>
         <p:spPr>
           <a:xfrm>
-            <a:off x="1956000" y="1364512"/>
-            <a:ext cx="8460481" cy="5160832"/>
+            <a:off x="894522" y="1513597"/>
+            <a:ext cx="10515600" cy="5160832"/>
           </a:xfrm>
         </p:spPr>
         <p:txBody>
@@ -7179,131 +7866,167 @@
               <a:buNone/>
             </a:pPr>
             <a:r>
-              <a:rPr lang="zh-TW" altLang="en-US" dirty="0"/>
+              <a:rPr lang="zh-TW" altLang="en-US" sz="2800" dirty="0"/>
               <a:t>所謂電腦網路（</a:t>
             </a:r>
             <a:r>
-              <a:rPr lang="en-US" altLang="zh-TW" dirty="0"/>
+              <a:rPr lang="en-US" altLang="zh-TW" sz="2800" dirty="0"/>
               <a:t>computer network</a:t>
             </a:r>
             <a:r>
-              <a:rPr lang="zh-TW" altLang="en-US" dirty="0"/>
+              <a:rPr lang="zh-TW" altLang="en-US" sz="2800" dirty="0"/>
               <a:t>）是指電腦與電腦之間利用纜線連結，以達到資料傳輸及資源共享的目的。</a:t>
             </a:r>
-            <a:endParaRPr lang="en-US" altLang="zh-TW" dirty="0"/>
+            <a:endParaRPr lang="en-US" altLang="zh-TW" sz="2800" dirty="0"/>
           </a:p>
           <a:p>
             <a:pPr marL="0" lvl="2" indent="0">
               <a:buNone/>
             </a:pPr>
-            <a:r>
-              <a:rPr lang="zh-TW" altLang="en-US" dirty="0"/>
-              <a:t>依網路連結的規模大小可以分為區域網路（</a:t>
-            </a:r>
-            <a:r>
-              <a:rPr lang="en-US" altLang="zh-TW" dirty="0"/>
-              <a:t>Local Area Network</a:t>
-            </a:r>
-            <a:r>
-              <a:rPr lang="zh-TW" altLang="en-US" dirty="0"/>
-              <a:t>，簡稱</a:t>
-            </a:r>
-            <a:r>
-              <a:rPr lang="en-US" altLang="zh-TW" dirty="0"/>
-              <a:t>LAN</a:t>
-            </a:r>
-            <a:r>
-              <a:rPr lang="zh-TW" altLang="en-US" dirty="0"/>
-              <a:t>）及廣域網路（</a:t>
-            </a:r>
-            <a:r>
-              <a:rPr lang="en-US" altLang="zh-TW" dirty="0"/>
-              <a:t>Wide Area Network</a:t>
-            </a:r>
-            <a:r>
-              <a:rPr lang="zh-TW" altLang="en-US" dirty="0"/>
-              <a:t>，簡稱</a:t>
-            </a:r>
-            <a:r>
-              <a:rPr lang="en-US" altLang="zh-TW" dirty="0"/>
-              <a:t>WAN</a:t>
-            </a:r>
-            <a:r>
-              <a:rPr lang="zh-TW" altLang="en-US" dirty="0"/>
-              <a:t>），現今所使用的網際網路（</a:t>
-            </a:r>
-            <a:r>
-              <a:rPr lang="en-US" altLang="zh-TW" dirty="0"/>
-              <a:t>Internet</a:t>
-            </a:r>
-            <a:r>
-              <a:rPr lang="zh-TW" altLang="en-US" dirty="0"/>
-              <a:t>）即是</a:t>
-            </a:r>
-            <a:r>
-              <a:rPr lang="en-US" altLang="zh-TW" dirty="0"/>
-              <a:t>WAN </a:t>
-            </a:r>
-            <a:r>
-              <a:rPr lang="zh-TW" altLang="en-US" dirty="0"/>
-              <a:t>的一種應用。</a:t>
-            </a:r>
-            <a:endParaRPr lang="en-US" altLang="zh-TW" dirty="0"/>
+            <a:endParaRPr lang="en-US" altLang="zh-TW" sz="2800" dirty="0"/>
           </a:p>
           <a:p>
             <a:pPr marL="0" lvl="2" indent="0">
               <a:buNone/>
             </a:pPr>
             <a:r>
-              <a:rPr lang="en-US" altLang="zh-TW" b="1" dirty="0"/>
+              <a:rPr lang="zh-TW" altLang="en-US" sz="2800" dirty="0"/>
+              <a:t>依網路連結的規模大小可以分為</a:t>
+            </a:r>
+            <a:r>
+              <a:rPr lang="zh-TW" altLang="en-US" sz="2800" dirty="0">
+                <a:solidFill>
+                  <a:srgbClr val="FF0000"/>
+                </a:solidFill>
+              </a:rPr>
+              <a:t>區域網路</a:t>
+            </a:r>
+            <a:r>
+              <a:rPr lang="zh-TW" altLang="en-US" sz="2800" dirty="0"/>
+              <a:t>（</a:t>
+            </a:r>
+            <a:r>
+              <a:rPr lang="en-US" altLang="zh-TW" sz="2800" dirty="0"/>
+              <a:t>Local Area Network</a:t>
+            </a:r>
+            <a:r>
+              <a:rPr lang="zh-TW" altLang="en-US" sz="2800" dirty="0"/>
+              <a:t>，簡稱</a:t>
+            </a:r>
+            <a:r>
+              <a:rPr lang="en-US" altLang="zh-TW" sz="2800" dirty="0"/>
+              <a:t>LAN</a:t>
+            </a:r>
+            <a:r>
+              <a:rPr lang="zh-TW" altLang="en-US" sz="2800" dirty="0"/>
+              <a:t>）及</a:t>
+            </a:r>
+            <a:r>
+              <a:rPr lang="zh-TW" altLang="en-US" sz="2800" dirty="0">
+                <a:solidFill>
+                  <a:srgbClr val="FF0000"/>
+                </a:solidFill>
+              </a:rPr>
+              <a:t>廣域網路</a:t>
+            </a:r>
+            <a:r>
+              <a:rPr lang="zh-TW" altLang="en-US" sz="2800" dirty="0"/>
+              <a:t>（</a:t>
+            </a:r>
+            <a:r>
+              <a:rPr lang="en-US" altLang="zh-TW" sz="2800" dirty="0"/>
+              <a:t>Wide Area Network</a:t>
+            </a:r>
+            <a:r>
+              <a:rPr lang="zh-TW" altLang="en-US" sz="2800" dirty="0"/>
+              <a:t>，簡稱</a:t>
+            </a:r>
+            <a:r>
+              <a:rPr lang="en-US" altLang="zh-TW" sz="2800" dirty="0"/>
+              <a:t>WAN</a:t>
+            </a:r>
+            <a:r>
+              <a:rPr lang="zh-TW" altLang="en-US" sz="2800" dirty="0"/>
+              <a:t>），現今所使用的網際網路（</a:t>
+            </a:r>
+            <a:r>
+              <a:rPr lang="en-US" altLang="zh-TW" sz="2800" dirty="0"/>
+              <a:t>Internet</a:t>
+            </a:r>
+            <a:r>
+              <a:rPr lang="zh-TW" altLang="en-US" sz="2800" dirty="0"/>
+              <a:t>）即是</a:t>
+            </a:r>
+            <a:r>
+              <a:rPr lang="en-US" altLang="zh-TW" sz="2800" dirty="0"/>
+              <a:t>WAN </a:t>
+            </a:r>
+            <a:r>
+              <a:rPr lang="zh-TW" altLang="en-US" sz="2800" dirty="0"/>
+              <a:t>的一種應用。</a:t>
+            </a:r>
+            <a:endParaRPr lang="en-US" altLang="zh-TW" sz="2800" dirty="0"/>
+          </a:p>
+          <a:p>
+            <a:pPr marL="0" lvl="2" indent="0">
+              <a:buNone/>
+            </a:pPr>
+            <a:endParaRPr lang="en-US" altLang="zh-TW" sz="2800" dirty="0"/>
+          </a:p>
+          <a:p>
+            <a:pPr marL="0" lvl="2" indent="0">
+              <a:buNone/>
+            </a:pPr>
+            <a:r>
+              <a:rPr lang="en-US" altLang="zh-TW" sz="2800" b="1" dirty="0"/>
               <a:t>Wi-Fi </a:t>
             </a:r>
             <a:r>
-              <a:rPr lang="zh-TW" altLang="en-US" b="1" dirty="0"/>
+              <a:rPr lang="zh-TW" altLang="en-US" sz="2800" b="1" dirty="0"/>
               <a:t>使用</a:t>
             </a:r>
             <a:r>
-              <a:rPr lang="en-US" altLang="zh-TW" b="1" dirty="0"/>
+              <a:rPr lang="en-US" altLang="zh-TW" sz="2800" b="1" dirty="0"/>
               <a:t>IEEE 802.11 </a:t>
             </a:r>
             <a:r>
-              <a:rPr lang="zh-TW" altLang="en-US" b="1" dirty="0"/>
+              <a:rPr lang="zh-TW" altLang="en-US" sz="2800" b="1" dirty="0"/>
               <a:t>規範的無線區域網路（</a:t>
             </a:r>
             <a:r>
-              <a:rPr lang="en-US" altLang="zh-TW" b="1" dirty="0"/>
+              <a:rPr lang="en-US" altLang="zh-TW" sz="2800" b="1" dirty="0"/>
               <a:t>Wireless Local Area Network</a:t>
             </a:r>
             <a:r>
-              <a:rPr lang="zh-TW" altLang="en-US" b="1" dirty="0"/>
+              <a:rPr lang="zh-TW" altLang="en-US" sz="2800" b="1" dirty="0"/>
               <a:t>，簡稱</a:t>
             </a:r>
             <a:r>
-              <a:rPr lang="en-US" altLang="zh-TW" b="1" dirty="0"/>
+              <a:rPr lang="en-US" altLang="zh-TW" sz="2800" b="1" dirty="0"/>
               <a:t>WLAN</a:t>
             </a:r>
             <a:r>
-              <a:rPr lang="zh-TW" altLang="en-US" b="1" dirty="0"/>
+              <a:rPr lang="zh-TW" altLang="en-US" sz="2800" b="1" dirty="0"/>
               <a:t>）標準及</a:t>
             </a:r>
             <a:r>
-              <a:rPr lang="en-US" altLang="zh-TW" b="1" dirty="0"/>
+              <a:rPr lang="en-US" altLang="zh-TW" sz="2800" b="1" dirty="0"/>
               <a:t>TCP/IP </a:t>
             </a:r>
             <a:r>
-              <a:rPr lang="zh-TW" altLang="en-US" b="1" dirty="0"/>
+              <a:rPr lang="zh-TW" altLang="en-US" sz="2800" b="1" dirty="0"/>
               <a:t>協定</a:t>
             </a:r>
             <a:r>
-              <a:rPr lang="zh-TW" altLang="en-US" dirty="0"/>
+              <a:rPr lang="zh-TW" altLang="en-US" sz="2800" dirty="0"/>
               <a:t>，所以在區域網路的設備或裝置，可以透過</a:t>
             </a:r>
             <a:r>
-              <a:rPr lang="en-US" altLang="zh-TW" dirty="0"/>
+              <a:rPr lang="en-US" altLang="zh-TW" sz="2800" dirty="0"/>
               <a:t>Wi-Fi </a:t>
             </a:r>
             <a:r>
-              <a:rPr lang="zh-TW" altLang="en-US" dirty="0"/>
+              <a:rPr lang="zh-TW" altLang="en-US" sz="2800" dirty="0"/>
               <a:t>連上網際網路。</a:t>
             </a:r>
           </a:p>
@@ -7902,7 +8625,7 @@
           <p:nvPr/>
         </p:nvPicPr>
         <p:blipFill>
-          <a:blip r:embed="rId2"/>
+          <a:blip r:embed="rId3"/>
           <a:stretch>
             <a:fillRect/>
           </a:stretch>
@@ -8515,7 +9238,7 @@
           <p:nvPr/>
         </p:nvPicPr>
         <p:blipFill>
-          <a:blip r:embed="rId2"/>
+          <a:blip r:embed="rId3"/>
           <a:stretch>
             <a:fillRect/>
           </a:stretch>
@@ -8560,85 +9283,6 @@
           <a:chExt cx="0" cy="0"/>
         </a:xfrm>
       </p:grpSpPr>
-      <p:sp>
-        <p:nvSpPr>
-          <p:cNvPr id="2" name="內容版面配置區 1">
-            <a:extLst>
-              <a:ext uri="{FF2B5EF4-FFF2-40B4-BE49-F238E27FC236}">
-                <a16:creationId xmlns:a16="http://schemas.microsoft.com/office/drawing/2014/main" id="{D50C77C5-58E4-430E-94B9-4D303E310789}"/>
-              </a:ext>
-            </a:extLst>
-          </p:cNvPr>
-          <p:cNvSpPr>
-            <a:spLocks noGrp="1"/>
-          </p:cNvSpPr>
-          <p:nvPr>
-            <p:ph sz="quarter" idx="10"/>
-          </p:nvPr>
-        </p:nvSpPr>
-        <p:spPr/>
-        <p:txBody>
-          <a:bodyPr/>
-          <a:lstStyle/>
-          <a:p>
-            <a:r>
-              <a:rPr lang="en-US" altLang="zh-TW" dirty="0"/>
-              <a:t>13-1-6 </a:t>
-            </a:r>
-            <a:r>
-              <a:rPr lang="zh-TW" altLang="en-US" dirty="0"/>
-              <a:t>廣域網路</a:t>
-            </a:r>
-            <a:endParaRPr lang="en-US" altLang="zh-TW" dirty="0"/>
-          </a:p>
-          <a:p>
-            <a:pPr marL="0" lvl="2" indent="0">
-              <a:buNone/>
-            </a:pPr>
-            <a:r>
-              <a:rPr lang="zh-TW" altLang="en-US" b="1" dirty="0"/>
-              <a:t>固定</a:t>
-            </a:r>
-            <a:r>
-              <a:rPr lang="en-US" altLang="zh-TW" b="1" dirty="0"/>
-              <a:t>IP </a:t>
-            </a:r>
-            <a:r>
-              <a:rPr lang="zh-TW" altLang="en-US" b="1" dirty="0"/>
-              <a:t>位址或浮動</a:t>
-            </a:r>
-            <a:r>
-              <a:rPr lang="en-US" altLang="zh-TW" b="1" dirty="0"/>
-              <a:t>IP </a:t>
-            </a:r>
-            <a:r>
-              <a:rPr lang="zh-TW" altLang="en-US" b="1" dirty="0"/>
-              <a:t>位址又稱為公用</a:t>
-            </a:r>
-            <a:r>
-              <a:rPr lang="en-US" altLang="zh-TW" b="1" dirty="0"/>
-              <a:t>IP</a:t>
-            </a:r>
-            <a:r>
-              <a:rPr lang="zh-TW" altLang="en-US" dirty="0"/>
-              <a:t>。</a:t>
-            </a:r>
-            <a:endParaRPr lang="en-US" altLang="zh-TW" dirty="0"/>
-          </a:p>
-          <a:p>
-            <a:pPr lvl="2"/>
-            <a:endParaRPr lang="en-US" altLang="zh-TW" dirty="0"/>
-          </a:p>
-          <a:p>
-            <a:pPr lvl="2"/>
-            <a:endParaRPr lang="en-US" altLang="zh-TW" dirty="0"/>
-          </a:p>
-          <a:p>
-            <a:pPr lvl="2"/>
-            <a:endParaRPr lang="zh-TW" altLang="en-US" dirty="0"/>
-          </a:p>
-        </p:txBody>
-      </p:sp>
       <p:pic>
         <p:nvPicPr>
           <p:cNvPr id="4" name="圖片 3">
@@ -8661,14 +9305,175 @@
         </p:blipFill>
         <p:spPr>
           <a:xfrm>
-            <a:off x="3414197" y="1988841"/>
-            <a:ext cx="5363607" cy="4266007"/>
+            <a:off x="3860771" y="74429"/>
+            <a:ext cx="8315023" cy="6613450"/>
           </a:xfrm>
           <a:prstGeom prst="rect">
             <a:avLst/>
           </a:prstGeom>
         </p:spPr>
       </p:pic>
+      <p:sp>
+        <p:nvSpPr>
+          <p:cNvPr id="2" name="內容版面配置區 1">
+            <a:extLst>
+              <a:ext uri="{FF2B5EF4-FFF2-40B4-BE49-F238E27FC236}">
+                <a16:creationId xmlns:a16="http://schemas.microsoft.com/office/drawing/2014/main" id="{D50C77C5-58E4-430E-94B9-4D303E310789}"/>
+              </a:ext>
+            </a:extLst>
+          </p:cNvPr>
+          <p:cNvSpPr>
+            <a:spLocks noGrp="1"/>
+          </p:cNvSpPr>
+          <p:nvPr>
+            <p:ph sz="quarter" idx="10"/>
+          </p:nvPr>
+        </p:nvSpPr>
+        <p:spPr/>
+        <p:txBody>
+          <a:bodyPr/>
+          <a:lstStyle/>
+          <a:p>
+            <a:r>
+              <a:rPr lang="en-US" altLang="zh-TW" dirty="0"/>
+              <a:t>13-1-6 </a:t>
+            </a:r>
+            <a:r>
+              <a:rPr lang="zh-TW" altLang="en-US" dirty="0"/>
+              <a:t>廣域網路</a:t>
+            </a:r>
+            <a:endParaRPr lang="en-US" altLang="zh-TW" dirty="0"/>
+          </a:p>
+          <a:p>
+            <a:pPr marL="0" lvl="2" indent="0">
+              <a:buNone/>
+            </a:pPr>
+            <a:r>
+              <a:rPr lang="zh-TW" altLang="en-US" b="1" dirty="0"/>
+              <a:t>固定</a:t>
+            </a:r>
+            <a:r>
+              <a:rPr lang="en-US" altLang="zh-TW" b="1" dirty="0"/>
+              <a:t>IP </a:t>
+            </a:r>
+            <a:r>
+              <a:rPr lang="zh-TW" altLang="en-US" b="1" dirty="0"/>
+              <a:t>位址或浮動</a:t>
+            </a:r>
+            <a:r>
+              <a:rPr lang="en-US" altLang="zh-TW" b="1" dirty="0"/>
+              <a:t>IP </a:t>
+            </a:r>
+            <a:r>
+              <a:rPr lang="zh-TW" altLang="en-US" b="1" dirty="0"/>
+              <a:t>位址又稱為公用</a:t>
+            </a:r>
+            <a:r>
+              <a:rPr lang="en-US" altLang="zh-TW" b="1" dirty="0"/>
+              <a:t>IP</a:t>
+            </a:r>
+            <a:r>
+              <a:rPr lang="zh-TW" altLang="en-US" dirty="0"/>
+              <a:t>。</a:t>
+            </a:r>
+            <a:endParaRPr lang="en-US" altLang="zh-TW" dirty="0"/>
+          </a:p>
+          <a:p>
+            <a:pPr lvl="2"/>
+            <a:endParaRPr lang="en-US" altLang="zh-TW" dirty="0"/>
+          </a:p>
+          <a:p>
+            <a:pPr lvl="2"/>
+            <a:endParaRPr lang="en-US" altLang="zh-TW" dirty="0"/>
+          </a:p>
+          <a:p>
+            <a:pPr lvl="2"/>
+            <a:endParaRPr lang="zh-TW" altLang="en-US" dirty="0"/>
+          </a:p>
+        </p:txBody>
+      </p:sp>
+      <p:cxnSp>
+        <p:nvCxnSpPr>
+          <p:cNvPr id="5" name="接點: 肘形 4">
+            <a:extLst>
+              <a:ext uri="{FF2B5EF4-FFF2-40B4-BE49-F238E27FC236}">
+                <a16:creationId xmlns:a16="http://schemas.microsoft.com/office/drawing/2014/main" id="{D6B3D9DF-12BB-B9F6-59FE-60B165DCA447}"/>
+              </a:ext>
+            </a:extLst>
+          </p:cNvPr>
+          <p:cNvCxnSpPr>
+            <a:cxnSpLocks/>
+          </p:cNvCxnSpPr>
+          <p:nvPr/>
+        </p:nvCxnSpPr>
+        <p:spPr>
+          <a:xfrm rot="16200000" flipH="1">
+            <a:off x="9287539" y="1483241"/>
+            <a:ext cx="2753833" cy="1616149"/>
+          </a:xfrm>
+          <a:prstGeom prst="bentConnector3">
+            <a:avLst>
+              <a:gd name="adj1" fmla="val 193"/>
+            </a:avLst>
+          </a:prstGeom>
+          <a:ln w="38100">
+            <a:tailEnd type="triangle"/>
+          </a:ln>
+        </p:spPr>
+        <p:style>
+          <a:lnRef idx="1">
+            <a:schemeClr val="accent1"/>
+          </a:lnRef>
+          <a:fillRef idx="0">
+            <a:schemeClr val="accent1"/>
+          </a:fillRef>
+          <a:effectRef idx="0">
+            <a:schemeClr val="accent1"/>
+          </a:effectRef>
+          <a:fontRef idx="minor">
+            <a:schemeClr val="tx1"/>
+          </a:fontRef>
+        </p:style>
+      </p:cxnSp>
+      <p:sp>
+        <p:nvSpPr>
+          <p:cNvPr id="8" name="文字方塊 7">
+            <a:extLst>
+              <a:ext uri="{FF2B5EF4-FFF2-40B4-BE49-F238E27FC236}">
+                <a16:creationId xmlns:a16="http://schemas.microsoft.com/office/drawing/2014/main" id="{DB9A1267-FB47-DBDB-EF0E-A68DA22F36F6}"/>
+              </a:ext>
+            </a:extLst>
+          </p:cNvPr>
+          <p:cNvSpPr txBox="1"/>
+          <p:nvPr/>
+        </p:nvSpPr>
+        <p:spPr>
+          <a:xfrm>
+            <a:off x="9718161" y="1945763"/>
+            <a:ext cx="1723549" cy="707886"/>
+          </a:xfrm>
+          <a:prstGeom prst="rect">
+            <a:avLst/>
+          </a:prstGeom>
+          <a:noFill/>
+        </p:spPr>
+        <p:txBody>
+          <a:bodyPr wrap="none" rtlCol="0">
+            <a:spAutoFit/>
+          </a:bodyPr>
+          <a:lstStyle/>
+          <a:p>
+            <a:r>
+              <a:rPr lang="zh-TW" altLang="en-US" sz="4000" dirty="0">
+                <a:solidFill>
+                  <a:srgbClr val="FF0000"/>
+                </a:solidFill>
+              </a:rPr>
+              <a:t>可重覆</a:t>
+            </a:r>
+          </a:p>
+        </p:txBody>
+      </p:sp>
     </p:spTree>
     <p:extLst>
       <p:ext uri="{BB962C8B-B14F-4D97-AF65-F5344CB8AC3E}">
@@ -9241,4 +10046,299 @@
   <a:objectDefaults/>
   <a:extraClrSchemeLst/>
 </a:theme>
+</file>
+
+<file path=ppt/theme/theme3.xml><?xml version="1.0" encoding="utf-8"?>
+<a:theme xmlns:a="http://schemas.openxmlformats.org/drawingml/2006/main" name="Office 佈景主題">
+  <a:themeElements>
+    <a:clrScheme name="Office">
+      <a:dk1>
+        <a:sysClr val="windowText" lastClr="000000"/>
+      </a:dk1>
+      <a:lt1>
+        <a:sysClr val="window" lastClr="FFFFFF"/>
+      </a:lt1>
+      <a:dk2>
+        <a:srgbClr val="44546A"/>
+      </a:dk2>
+      <a:lt2>
+        <a:srgbClr val="E7E6E6"/>
+      </a:lt2>
+      <a:accent1>
+        <a:srgbClr val="4472C4"/>
+      </a:accent1>
+      <a:accent2>
+        <a:srgbClr val="ED7D31"/>
+      </a:accent2>
+      <a:accent3>
+        <a:srgbClr val="A5A5A5"/>
+      </a:accent3>
+      <a:accent4>
+        <a:srgbClr val="FFC000"/>
+      </a:accent4>
+      <a:accent5>
+        <a:srgbClr val="5B9BD5"/>
+      </a:accent5>
+      <a:accent6>
+        <a:srgbClr val="70AD47"/>
+      </a:accent6>
+      <a:hlink>
+        <a:srgbClr val="0563C1"/>
+      </a:hlink>
+      <a:folHlink>
+        <a:srgbClr val="954F72"/>
+      </a:folHlink>
+    </a:clrScheme>
+    <a:fontScheme name="Office">
+      <a:majorFont>
+        <a:latin typeface="Calibri Light" panose="020F0302020204030204"/>
+        <a:ea typeface=""/>
+        <a:cs typeface=""/>
+        <a:font script="Jpan" typeface="游ゴシック Light"/>
+        <a:font script="Hang" typeface="맑은 고딕"/>
+        <a:font script="Hans" typeface="等线 Light"/>
+        <a:font script="Hant" typeface="新細明體"/>
+        <a:font script="Arab" typeface="Times New Roman"/>
+        <a:font script="Hebr" typeface="Times New Roman"/>
+        <a:font script="Thai" typeface="Angsana New"/>
+        <a:font script="Ethi" typeface="Nyala"/>
+        <a:font script="Beng" typeface="Vrinda"/>
+        <a:font script="Gujr" typeface="Shruti"/>
+        <a:font script="Khmr" typeface="MoolBoran"/>
+        <a:font script="Knda" typeface="Tunga"/>
+        <a:font script="Guru" typeface="Raavi"/>
+        <a:font script="Cans" typeface="Euphemia"/>
+        <a:font script="Cher" typeface="Plantagenet Cherokee"/>
+        <a:font script="Yiii" typeface="Microsoft Yi Baiti"/>
+        <a:font script="Tibt" typeface="Microsoft Himalaya"/>
+        <a:font script="Thaa" typeface="MV Boli"/>
+        <a:font script="Deva" typeface="Mangal"/>
+        <a:font script="Telu" typeface="Gautami"/>
+        <a:font script="Taml" typeface="Latha"/>
+        <a:font script="Syrc" typeface="Estrangelo Edessa"/>
+        <a:font script="Orya" typeface="Kalinga"/>
+        <a:font script="Mlym" typeface="Kartika"/>
+        <a:font script="Laoo" typeface="DokChampa"/>
+        <a:font script="Sinh" typeface="Iskoola Pota"/>
+        <a:font script="Mong" typeface="Mongolian Baiti"/>
+        <a:font script="Viet" typeface="Times New Roman"/>
+        <a:font script="Uigh" typeface="Microsoft Uighur"/>
+        <a:font script="Geor" typeface="Sylfaen"/>
+        <a:font script="Armn" typeface="Arial"/>
+        <a:font script="Bugi" typeface="Leelawadee UI"/>
+        <a:font script="Bopo" typeface="Microsoft JhengHei"/>
+        <a:font script="Java" typeface="Javanese Text"/>
+        <a:font script="Lisu" typeface="Segoe UI"/>
+        <a:font script="Mymr" typeface="Myanmar Text"/>
+        <a:font script="Nkoo" typeface="Ebrima"/>
+        <a:font script="Olck" typeface="Nirmala UI"/>
+        <a:font script="Osma" typeface="Ebrima"/>
+        <a:font script="Phag" typeface="Phagspa"/>
+        <a:font script="Syrn" typeface="Estrangelo Edessa"/>
+        <a:font script="Syrj" typeface="Estrangelo Edessa"/>
+        <a:font script="Syre" typeface="Estrangelo Edessa"/>
+        <a:font script="Sora" typeface="Nirmala UI"/>
+        <a:font script="Tale" typeface="Microsoft Tai Le"/>
+        <a:font script="Talu" typeface="Microsoft New Tai Lue"/>
+        <a:font script="Tfng" typeface="Ebrima"/>
+      </a:majorFont>
+      <a:minorFont>
+        <a:latin typeface="Calibri" panose="020F0502020204030204"/>
+        <a:ea typeface=""/>
+        <a:cs typeface=""/>
+        <a:font script="Jpan" typeface="游ゴシック"/>
+        <a:font script="Hang" typeface="맑은 고딕"/>
+        <a:font script="Hans" typeface="等线"/>
+        <a:font script="Hant" typeface="新細明體"/>
+        <a:font script="Arab" typeface="Arial"/>
+        <a:font script="Hebr" typeface="Arial"/>
+        <a:font script="Thai" typeface="Cordia New"/>
+        <a:font script="Ethi" typeface="Nyala"/>
+        <a:font script="Beng" typeface="Vrinda"/>
+        <a:font script="Gujr" typeface="Shruti"/>
+        <a:font script="Khmr" typeface="DaunPenh"/>
+        <a:font script="Knda" typeface="Tunga"/>
+        <a:font script="Guru" typeface="Raavi"/>
+        <a:font script="Cans" typeface="Euphemia"/>
+        <a:font script="Cher" typeface="Plantagenet Cherokee"/>
+        <a:font script="Yiii" typeface="Microsoft Yi Baiti"/>
+        <a:font script="Tibt" typeface="Microsoft Himalaya"/>
+        <a:font script="Thaa" typeface="MV Boli"/>
+        <a:font script="Deva" typeface="Mangal"/>
+        <a:font script="Telu" typeface="Gautami"/>
+        <a:font script="Taml" typeface="Latha"/>
+        <a:font script="Syrc" typeface="Estrangelo Edessa"/>
+        <a:font script="Orya" typeface="Kalinga"/>
+        <a:font script="Mlym" typeface="Kartika"/>
+        <a:font script="Laoo" typeface="DokChampa"/>
+        <a:font script="Sinh" typeface="Iskoola Pota"/>
+        <a:font script="Mong" typeface="Mongolian Baiti"/>
+        <a:font script="Viet" typeface="Arial"/>
+        <a:font script="Uigh" typeface="Microsoft Uighur"/>
+        <a:font script="Geor" typeface="Sylfaen"/>
+        <a:font script="Armn" typeface="Arial"/>
+        <a:font script="Bugi" typeface="Leelawadee UI"/>
+        <a:font script="Bopo" typeface="Microsoft JhengHei"/>
+        <a:font script="Java" typeface="Javanese Text"/>
+        <a:font script="Lisu" typeface="Segoe UI"/>
+        <a:font script="Mymr" typeface="Myanmar Text"/>
+        <a:font script="Nkoo" typeface="Ebrima"/>
+        <a:font script="Olck" typeface="Nirmala UI"/>
+        <a:font script="Osma" typeface="Ebrima"/>
+        <a:font script="Phag" typeface="Phagspa"/>
+        <a:font script="Syrn" typeface="Estrangelo Edessa"/>
+        <a:font script="Syrj" typeface="Estrangelo Edessa"/>
+        <a:font script="Syre" typeface="Estrangelo Edessa"/>
+        <a:font script="Sora" typeface="Nirmala UI"/>
+        <a:font script="Tale" typeface="Microsoft Tai Le"/>
+        <a:font script="Talu" typeface="Microsoft New Tai Lue"/>
+        <a:font script="Tfng" typeface="Ebrima"/>
+      </a:minorFont>
+    </a:fontScheme>
+    <a:fmtScheme name="Office">
+      <a:fillStyleLst>
+        <a:solidFill>
+          <a:schemeClr val="phClr"/>
+        </a:solidFill>
+        <a:gradFill rotWithShape="1">
+          <a:gsLst>
+            <a:gs pos="0">
+              <a:schemeClr val="phClr">
+                <a:lumMod val="110000"/>
+                <a:satMod val="105000"/>
+                <a:tint val="67000"/>
+              </a:schemeClr>
+            </a:gs>
+            <a:gs pos="50000">
+              <a:schemeClr val="phClr">
+                <a:lumMod val="105000"/>
+                <a:satMod val="103000"/>
+                <a:tint val="73000"/>
+              </a:schemeClr>
+            </a:gs>
+            <a:gs pos="100000">
+              <a:schemeClr val="phClr">
+                <a:lumMod val="105000"/>
+                <a:satMod val="109000"/>
+                <a:tint val="81000"/>
+              </a:schemeClr>
+            </a:gs>
+          </a:gsLst>
+          <a:lin ang="5400000" scaled="0"/>
+        </a:gradFill>
+        <a:gradFill rotWithShape="1">
+          <a:gsLst>
+            <a:gs pos="0">
+              <a:schemeClr val="phClr">
+                <a:satMod val="103000"/>
+                <a:lumMod val="102000"/>
+                <a:tint val="94000"/>
+              </a:schemeClr>
+            </a:gs>
+            <a:gs pos="50000">
+              <a:schemeClr val="phClr">
+                <a:satMod val="110000"/>
+                <a:lumMod val="100000"/>
+                <a:shade val="100000"/>
+              </a:schemeClr>
+            </a:gs>
+            <a:gs pos="100000">
+              <a:schemeClr val="phClr">
+                <a:lumMod val="99000"/>
+                <a:satMod val="120000"/>
+                <a:shade val="78000"/>
+              </a:schemeClr>
+            </a:gs>
+          </a:gsLst>
+          <a:lin ang="5400000" scaled="0"/>
+        </a:gradFill>
+      </a:fillStyleLst>
+      <a:lnStyleLst>
+        <a:ln w="6350" cap="flat" cmpd="sng" algn="ctr">
+          <a:solidFill>
+            <a:schemeClr val="phClr"/>
+          </a:solidFill>
+          <a:prstDash val="solid"/>
+          <a:miter lim="800000"/>
+        </a:ln>
+        <a:ln w="12700" cap="flat" cmpd="sng" algn="ctr">
+          <a:solidFill>
+            <a:schemeClr val="phClr"/>
+          </a:solidFill>
+          <a:prstDash val="solid"/>
+          <a:miter lim="800000"/>
+        </a:ln>
+        <a:ln w="19050" cap="flat" cmpd="sng" algn="ctr">
+          <a:solidFill>
+            <a:schemeClr val="phClr"/>
+          </a:solidFill>
+          <a:prstDash val="solid"/>
+          <a:miter lim="800000"/>
+        </a:ln>
+      </a:lnStyleLst>
+      <a:effectStyleLst>
+        <a:effectStyle>
+          <a:effectLst/>
+        </a:effectStyle>
+        <a:effectStyle>
+          <a:effectLst/>
+        </a:effectStyle>
+        <a:effectStyle>
+          <a:effectLst>
+            <a:outerShdw blurRad="57150" dist="19050" dir="5400000" algn="ctr" rotWithShape="0">
+              <a:srgbClr val="000000">
+                <a:alpha val="63000"/>
+              </a:srgbClr>
+            </a:outerShdw>
+          </a:effectLst>
+        </a:effectStyle>
+      </a:effectStyleLst>
+      <a:bgFillStyleLst>
+        <a:solidFill>
+          <a:schemeClr val="phClr"/>
+        </a:solidFill>
+        <a:solidFill>
+          <a:schemeClr val="phClr">
+            <a:tint val="95000"/>
+            <a:satMod val="170000"/>
+          </a:schemeClr>
+        </a:solidFill>
+        <a:gradFill rotWithShape="1">
+          <a:gsLst>
+            <a:gs pos="0">
+              <a:schemeClr val="phClr">
+                <a:tint val="93000"/>
+                <a:satMod val="150000"/>
+                <a:shade val="98000"/>
+                <a:lumMod val="102000"/>
+              </a:schemeClr>
+            </a:gs>
+            <a:gs pos="50000">
+              <a:schemeClr val="phClr">
+                <a:tint val="98000"/>
+                <a:satMod val="130000"/>
+                <a:shade val="90000"/>
+                <a:lumMod val="103000"/>
+              </a:schemeClr>
+            </a:gs>
+            <a:gs pos="100000">
+              <a:schemeClr val="phClr">
+                <a:shade val="63000"/>
+                <a:satMod val="120000"/>
+              </a:schemeClr>
+            </a:gs>
+          </a:gsLst>
+          <a:lin ang="5400000" scaled="0"/>
+        </a:gradFill>
+      </a:bgFillStyleLst>
+    </a:fmtScheme>
+  </a:themeElements>
+  <a:objectDefaults/>
+  <a:extraClrSchemeLst/>
+  <a:extLst>
+    <a:ext uri="{05A4C25C-085E-4340-85A3-A5531E510DB2}">
+      <thm15:themeFamily xmlns:thm15="http://schemas.microsoft.com/office/thememl/2012/main" name="Office Theme" id="{62F939B6-93AF-4DB8-9C6B-D6C7DFDC589F}" vid="{4A3C46E8-61CC-4603-A589-7422A47A8E4A}"/>
+    </a:ext>
+  </a:extLst>
+</a:theme>
 </file>